--- a/public/fun/pack/pptx/wedding/결혼식_23_식순중심_여름낮잠.pptx
+++ b/public/fun/pack/pptx/wedding/결혼식_23_식순중심_여름낮잠.pptx
@@ -3347,7 +3347,7 @@
             <a:r>
               <a:rPr sz="3600" b="1" i="0">
                 <a:solidFill>
-                  <a:srgbClr val="314F22"/>
+                  <a:srgbClr val="115F41"/>
                 </a:solidFill>
               </a:rPr>
               <a:t>저희 결혼합니다</a:t>
@@ -3385,7 +3385,7 @@
             <a:r>
               <a:rPr sz="1700" b="0" i="1">
                 <a:solidFill>
-                  <a:srgbClr val="314F22"/>
+                  <a:srgbClr val="115F41"/>
                 </a:solidFill>
               </a:rPr>
               <a:t>더운 날이라 식은 짧게 합니다</a:t>
@@ -3460,7 +3460,7 @@
     <p:bg>
       <p:bgPr>
         <a:solidFill>
-          <a:srgbClr val="F3F9F1"/>
+          <a:srgbClr val="EEFCF6"/>
         </a:solidFill>
         <a:effectLst/>
       </p:bgPr>
@@ -3487,7 +3487,7 @@
             <a:avLst/>
           </a:prstGeom>
           <a:solidFill>
-            <a:srgbClr val="5D9640"/>
+            <a:srgbClr val="26C588"/>
           </a:solidFill>
           <a:ln>
             <a:noFill/>
@@ -3516,7 +3516,7 @@
             <a:avLst/>
           </a:prstGeom>
           <a:solidFill>
-            <a:srgbClr val="4B3D8F"/>
+            <a:srgbClr val="209DB6"/>
           </a:solidFill>
           <a:ln>
             <a:noFill/>
@@ -3560,7 +3560,7 @@
             <a:r>
               <a:rPr sz="3000" b="1" i="0">
                 <a:solidFill>
-                  <a:srgbClr val="314F22"/>
+                  <a:srgbClr val="115F41"/>
                 </a:solidFill>
               </a:rPr>
               <a:t>신랑 · 신부 소개</a:t>
@@ -3583,11 +3583,11 @@
             <a:avLst/>
           </a:prstGeom>
           <a:solidFill>
-            <a:srgbClr val="DCEED3"/>
+            <a:srgbClr val="D1FAEA"/>
           </a:solidFill>
           <a:ln w="19050">
             <a:solidFill>
-              <a:srgbClr val="5D9640"/>
+              <a:srgbClr val="26C588"/>
             </a:solidFill>
             <a:prstDash val="dash"/>
           </a:ln>
@@ -3606,7 +3606,7 @@
             <a:r>
               <a:rPr sz="1200" b="0" i="0">
                 <a:solidFill>
-                  <a:srgbClr val="314F22"/>
+                  <a:srgbClr val="115F41"/>
                 </a:solidFill>
               </a:rPr>
               <a:t>사진</a:t>
@@ -3644,7 +3644,7 @@
             <a:r>
               <a:rPr sz="1600" b="1" i="0">
                 <a:solidFill>
-                  <a:srgbClr val="314F22"/>
+                  <a:srgbClr val="115F41"/>
                 </a:solidFill>
               </a:rPr>
               <a:t>신랑</a:t>
@@ -3735,11 +3735,11 @@
             <a:avLst/>
           </a:prstGeom>
           <a:solidFill>
-            <a:srgbClr val="DCEED3"/>
+            <a:srgbClr val="D1FAEA"/>
           </a:solidFill>
           <a:ln w="19050">
             <a:solidFill>
-              <a:srgbClr val="5D9640"/>
+              <a:srgbClr val="26C588"/>
             </a:solidFill>
             <a:prstDash val="dash"/>
           </a:ln>
@@ -3758,7 +3758,7 @@
             <a:r>
               <a:rPr sz="1200" b="0" i="0">
                 <a:solidFill>
-                  <a:srgbClr val="314F22"/>
+                  <a:srgbClr val="115F41"/>
                 </a:solidFill>
               </a:rPr>
               <a:t>사진</a:t>
@@ -3796,7 +3796,7 @@
             <a:r>
               <a:rPr sz="1600" b="1" i="0">
                 <a:solidFill>
-                  <a:srgbClr val="314F22"/>
+                  <a:srgbClr val="115F41"/>
                 </a:solidFill>
               </a:rPr>
               <a:t>신부</a:t>
@@ -3886,7 +3886,7 @@
     <p:bg>
       <p:bgPr>
         <a:solidFill>
-          <a:srgbClr val="F3F9F1"/>
+          <a:srgbClr val="EEFCF6"/>
         </a:solidFill>
         <a:effectLst/>
       </p:bgPr>
@@ -3913,7 +3913,7 @@
             <a:avLst/>
           </a:prstGeom>
           <a:solidFill>
-            <a:srgbClr val="5D9640"/>
+            <a:srgbClr val="26C588"/>
           </a:solidFill>
           <a:ln>
             <a:noFill/>
@@ -3942,7 +3942,7 @@
             <a:avLst/>
           </a:prstGeom>
           <a:solidFill>
-            <a:srgbClr val="4B3D8F"/>
+            <a:srgbClr val="209DB6"/>
           </a:solidFill>
           <a:ln>
             <a:noFill/>
@@ -3986,7 +3986,7 @@
             <a:r>
               <a:rPr sz="3000" b="1" i="0">
                 <a:solidFill>
-                  <a:srgbClr val="314F22"/>
+                  <a:srgbClr val="115F41"/>
                 </a:solidFill>
               </a:rPr>
               <a:t>식순 안내</a:t>
@@ -4037,30 +4037,30 @@
                   <a:tcPr anchor="ctr" marL="73152" marR="73152">
                     <a:lnL w="9525" cap="flat" cmpd="sng" algn="ctr">
                       <a:solidFill>
-                        <a:srgbClr val="5D9640"/>
+                        <a:srgbClr val="26C588"/>
                       </a:solidFill>
                       <a:prstDash val="solid"/>
                     </a:lnL>
                     <a:lnR w="9525" cap="flat" cmpd="sng" algn="ctr">
                       <a:solidFill>
-                        <a:srgbClr val="5D9640"/>
+                        <a:srgbClr val="26C588"/>
                       </a:solidFill>
                       <a:prstDash val="solid"/>
                     </a:lnR>
                     <a:lnT w="9525" cap="flat" cmpd="sng" algn="ctr">
                       <a:solidFill>
-                        <a:srgbClr val="5D9640"/>
+                        <a:srgbClr val="26C588"/>
                       </a:solidFill>
                       <a:prstDash val="solid"/>
                     </a:lnT>
                     <a:lnB w="9525" cap="flat" cmpd="sng" algn="ctr">
                       <a:solidFill>
-                        <a:srgbClr val="5D9640"/>
+                        <a:srgbClr val="26C588"/>
                       </a:solidFill>
                       <a:prstDash val="solid"/>
                     </a:lnB>
                     <a:solidFill>
-                      <a:srgbClr val="5D9640"/>
+                      <a:srgbClr val="26C588"/>
                     </a:solidFill>
                   </a:tcPr>
                 </a:tc>
@@ -4083,30 +4083,30 @@
                   <a:tcPr anchor="ctr" marL="73152" marR="73152">
                     <a:lnL w="9525" cap="flat" cmpd="sng" algn="ctr">
                       <a:solidFill>
-                        <a:srgbClr val="5D9640"/>
+                        <a:srgbClr val="26C588"/>
                       </a:solidFill>
                       <a:prstDash val="solid"/>
                     </a:lnL>
                     <a:lnR w="9525" cap="flat" cmpd="sng" algn="ctr">
                       <a:solidFill>
-                        <a:srgbClr val="5D9640"/>
+                        <a:srgbClr val="26C588"/>
                       </a:solidFill>
                       <a:prstDash val="solid"/>
                     </a:lnR>
                     <a:lnT w="9525" cap="flat" cmpd="sng" algn="ctr">
                       <a:solidFill>
-                        <a:srgbClr val="5D9640"/>
+                        <a:srgbClr val="26C588"/>
                       </a:solidFill>
                       <a:prstDash val="solid"/>
                     </a:lnT>
                     <a:lnB w="9525" cap="flat" cmpd="sng" algn="ctr">
                       <a:solidFill>
-                        <a:srgbClr val="5D9640"/>
+                        <a:srgbClr val="26C588"/>
                       </a:solidFill>
                       <a:prstDash val="solid"/>
                     </a:lnB>
                     <a:solidFill>
-                      <a:srgbClr val="5D9640"/>
+                      <a:srgbClr val="26C588"/>
                     </a:solidFill>
                   </a:tcPr>
                 </a:tc>
@@ -4129,30 +4129,30 @@
                   <a:tcPr anchor="ctr" marL="73152" marR="73152">
                     <a:lnL w="9525" cap="flat" cmpd="sng" algn="ctr">
                       <a:solidFill>
-                        <a:srgbClr val="5D9640"/>
+                        <a:srgbClr val="26C588"/>
                       </a:solidFill>
                       <a:prstDash val="solid"/>
                     </a:lnL>
                     <a:lnR w="9525" cap="flat" cmpd="sng" algn="ctr">
                       <a:solidFill>
-                        <a:srgbClr val="5D9640"/>
+                        <a:srgbClr val="26C588"/>
                       </a:solidFill>
                       <a:prstDash val="solid"/>
                     </a:lnR>
                     <a:lnT w="9525" cap="flat" cmpd="sng" algn="ctr">
                       <a:solidFill>
-                        <a:srgbClr val="5D9640"/>
+                        <a:srgbClr val="26C588"/>
                       </a:solidFill>
                       <a:prstDash val="solid"/>
                     </a:lnT>
                     <a:lnB w="9525" cap="flat" cmpd="sng" algn="ctr">
                       <a:solidFill>
-                        <a:srgbClr val="5D9640"/>
+                        <a:srgbClr val="26C588"/>
                       </a:solidFill>
                       <a:prstDash val="solid"/>
                     </a:lnB>
                     <a:solidFill>
-                      <a:srgbClr val="5D9640"/>
+                      <a:srgbClr val="26C588"/>
                     </a:solidFill>
                   </a:tcPr>
                 </a:tc>
@@ -4167,7 +4167,7 @@
                       <a:r>
                         <a:rPr sz="1500" b="1">
                           <a:solidFill>
-                            <a:srgbClr val="314F22"/>
+                            <a:srgbClr val="115F41"/>
                           </a:solidFill>
                         </a:rPr>
                         <a:t>00:00</a:t>
@@ -4177,30 +4177,30 @@
                   <a:tcPr anchor="ctr" marL="73152" marR="73152">
                     <a:lnL w="9525" cap="flat" cmpd="sng" algn="ctr">
                       <a:solidFill>
-                        <a:srgbClr val="DCEED3"/>
+                        <a:srgbClr val="D1FAEA"/>
                       </a:solidFill>
                       <a:prstDash val="solid"/>
                     </a:lnL>
                     <a:lnR w="9525" cap="flat" cmpd="sng" algn="ctr">
                       <a:solidFill>
-                        <a:srgbClr val="DCEED3"/>
+                        <a:srgbClr val="D1FAEA"/>
                       </a:solidFill>
                       <a:prstDash val="solid"/>
                     </a:lnR>
                     <a:lnT w="9525" cap="flat" cmpd="sng" algn="ctr">
                       <a:solidFill>
-                        <a:srgbClr val="DCEED3"/>
+                        <a:srgbClr val="D1FAEA"/>
                       </a:solidFill>
                       <a:prstDash val="solid"/>
                     </a:lnT>
                     <a:lnB w="9525" cap="flat" cmpd="sng" algn="ctr">
                       <a:solidFill>
-                        <a:srgbClr val="DCEED3"/>
+                        <a:srgbClr val="D1FAEA"/>
                       </a:solidFill>
                       <a:prstDash val="solid"/>
                     </a:lnB>
                     <a:solidFill>
-                      <a:srgbClr val="DCEED3"/>
+                      <a:srgbClr val="D1FAEA"/>
                     </a:solidFill>
                   </a:tcPr>
                 </a:tc>
@@ -4223,25 +4223,25 @@
                   <a:tcPr anchor="ctr" marL="73152" marR="73152">
                     <a:lnL w="9525" cap="flat" cmpd="sng" algn="ctr">
                       <a:solidFill>
-                        <a:srgbClr val="DCEED3"/>
+                        <a:srgbClr val="D1FAEA"/>
                       </a:solidFill>
                       <a:prstDash val="solid"/>
                     </a:lnL>
                     <a:lnR w="9525" cap="flat" cmpd="sng" algn="ctr">
                       <a:solidFill>
-                        <a:srgbClr val="DCEED3"/>
+                        <a:srgbClr val="D1FAEA"/>
                       </a:solidFill>
                       <a:prstDash val="solid"/>
                     </a:lnR>
                     <a:lnT w="9525" cap="flat" cmpd="sng" algn="ctr">
                       <a:solidFill>
-                        <a:srgbClr val="DCEED3"/>
+                        <a:srgbClr val="D1FAEA"/>
                       </a:solidFill>
                       <a:prstDash val="solid"/>
                     </a:lnT>
                     <a:lnB w="9525" cap="flat" cmpd="sng" algn="ctr">
                       <a:solidFill>
-                        <a:srgbClr val="DCEED3"/>
+                        <a:srgbClr val="D1FAEA"/>
                       </a:solidFill>
                       <a:prstDash val="solid"/>
                     </a:lnB>
@@ -4269,25 +4269,25 @@
                   <a:tcPr anchor="ctr" marL="73152" marR="73152">
                     <a:lnL w="9525" cap="flat" cmpd="sng" algn="ctr">
                       <a:solidFill>
-                        <a:srgbClr val="DCEED3"/>
+                        <a:srgbClr val="D1FAEA"/>
                       </a:solidFill>
                       <a:prstDash val="solid"/>
                     </a:lnL>
                     <a:lnR w="9525" cap="flat" cmpd="sng" algn="ctr">
                       <a:solidFill>
-                        <a:srgbClr val="DCEED3"/>
+                        <a:srgbClr val="D1FAEA"/>
                       </a:solidFill>
                       <a:prstDash val="solid"/>
                     </a:lnR>
                     <a:lnT w="9525" cap="flat" cmpd="sng" algn="ctr">
                       <a:solidFill>
-                        <a:srgbClr val="DCEED3"/>
+                        <a:srgbClr val="D1FAEA"/>
                       </a:solidFill>
                       <a:prstDash val="solid"/>
                     </a:lnT>
                     <a:lnB w="9525" cap="flat" cmpd="sng" algn="ctr">
                       <a:solidFill>
-                        <a:srgbClr val="DCEED3"/>
+                        <a:srgbClr val="D1FAEA"/>
                       </a:solidFill>
                       <a:prstDash val="solid"/>
                     </a:lnB>
@@ -4307,7 +4307,7 @@
                       <a:r>
                         <a:rPr sz="1500" b="1">
                           <a:solidFill>
-                            <a:srgbClr val="314F22"/>
+                            <a:srgbClr val="115F41"/>
                           </a:solidFill>
                         </a:rPr>
                         <a:t>00:00</a:t>
@@ -4317,30 +4317,30 @@
                   <a:tcPr anchor="ctr" marL="73152" marR="73152">
                     <a:lnL w="9525" cap="flat" cmpd="sng" algn="ctr">
                       <a:solidFill>
-                        <a:srgbClr val="DCEED3"/>
+                        <a:srgbClr val="D1FAEA"/>
                       </a:solidFill>
                       <a:prstDash val="solid"/>
                     </a:lnL>
                     <a:lnR w="9525" cap="flat" cmpd="sng" algn="ctr">
                       <a:solidFill>
-                        <a:srgbClr val="DCEED3"/>
+                        <a:srgbClr val="D1FAEA"/>
                       </a:solidFill>
                       <a:prstDash val="solid"/>
                     </a:lnR>
                     <a:lnT w="9525" cap="flat" cmpd="sng" algn="ctr">
                       <a:solidFill>
-                        <a:srgbClr val="DCEED3"/>
+                        <a:srgbClr val="D1FAEA"/>
                       </a:solidFill>
                       <a:prstDash val="solid"/>
                     </a:lnT>
                     <a:lnB w="9525" cap="flat" cmpd="sng" algn="ctr">
                       <a:solidFill>
-                        <a:srgbClr val="DCEED3"/>
+                        <a:srgbClr val="D1FAEA"/>
                       </a:solidFill>
                       <a:prstDash val="solid"/>
                     </a:lnB>
                     <a:solidFill>
-                      <a:srgbClr val="DCEED3"/>
+                      <a:srgbClr val="D1FAEA"/>
                     </a:solidFill>
                   </a:tcPr>
                 </a:tc>
@@ -4363,30 +4363,30 @@
                   <a:tcPr anchor="ctr" marL="73152" marR="73152">
                     <a:lnL w="9525" cap="flat" cmpd="sng" algn="ctr">
                       <a:solidFill>
-                        <a:srgbClr val="DCEED3"/>
+                        <a:srgbClr val="D1FAEA"/>
                       </a:solidFill>
                       <a:prstDash val="solid"/>
                     </a:lnL>
                     <a:lnR w="9525" cap="flat" cmpd="sng" algn="ctr">
                       <a:solidFill>
-                        <a:srgbClr val="DCEED3"/>
+                        <a:srgbClr val="D1FAEA"/>
                       </a:solidFill>
                       <a:prstDash val="solid"/>
                     </a:lnR>
                     <a:lnT w="9525" cap="flat" cmpd="sng" algn="ctr">
                       <a:solidFill>
-                        <a:srgbClr val="DCEED3"/>
+                        <a:srgbClr val="D1FAEA"/>
                       </a:solidFill>
                       <a:prstDash val="solid"/>
                     </a:lnT>
                     <a:lnB w="9525" cap="flat" cmpd="sng" algn="ctr">
                       <a:solidFill>
-                        <a:srgbClr val="DCEED3"/>
+                        <a:srgbClr val="D1FAEA"/>
                       </a:solidFill>
                       <a:prstDash val="solid"/>
                     </a:lnB>
                     <a:solidFill>
-                      <a:srgbClr val="F3F9F1"/>
+                      <a:srgbClr val="EEFCF6"/>
                     </a:solidFill>
                   </a:tcPr>
                 </a:tc>
@@ -4409,30 +4409,30 @@
                   <a:tcPr anchor="ctr" marL="73152" marR="73152">
                     <a:lnL w="9525" cap="flat" cmpd="sng" algn="ctr">
                       <a:solidFill>
-                        <a:srgbClr val="DCEED3"/>
+                        <a:srgbClr val="D1FAEA"/>
                       </a:solidFill>
                       <a:prstDash val="solid"/>
                     </a:lnL>
                     <a:lnR w="9525" cap="flat" cmpd="sng" algn="ctr">
                       <a:solidFill>
-                        <a:srgbClr val="DCEED3"/>
+                        <a:srgbClr val="D1FAEA"/>
                       </a:solidFill>
                       <a:prstDash val="solid"/>
                     </a:lnR>
                     <a:lnT w="9525" cap="flat" cmpd="sng" algn="ctr">
                       <a:solidFill>
-                        <a:srgbClr val="DCEED3"/>
+                        <a:srgbClr val="D1FAEA"/>
                       </a:solidFill>
                       <a:prstDash val="solid"/>
                     </a:lnT>
                     <a:lnB w="9525" cap="flat" cmpd="sng" algn="ctr">
                       <a:solidFill>
-                        <a:srgbClr val="DCEED3"/>
+                        <a:srgbClr val="D1FAEA"/>
                       </a:solidFill>
                       <a:prstDash val="solid"/>
                     </a:lnB>
                     <a:solidFill>
-                      <a:srgbClr val="F3F9F1"/>
+                      <a:srgbClr val="EEFCF6"/>
                     </a:solidFill>
                   </a:tcPr>
                 </a:tc>
@@ -4447,7 +4447,7 @@
                       <a:r>
                         <a:rPr sz="1500" b="1">
                           <a:solidFill>
-                            <a:srgbClr val="314F22"/>
+                            <a:srgbClr val="115F41"/>
                           </a:solidFill>
                         </a:rPr>
                         <a:t>00:00</a:t>
@@ -4457,30 +4457,30 @@
                   <a:tcPr anchor="ctr" marL="73152" marR="73152">
                     <a:lnL w="9525" cap="flat" cmpd="sng" algn="ctr">
                       <a:solidFill>
-                        <a:srgbClr val="DCEED3"/>
+                        <a:srgbClr val="D1FAEA"/>
                       </a:solidFill>
                       <a:prstDash val="solid"/>
                     </a:lnL>
                     <a:lnR w="9525" cap="flat" cmpd="sng" algn="ctr">
                       <a:solidFill>
-                        <a:srgbClr val="DCEED3"/>
+                        <a:srgbClr val="D1FAEA"/>
                       </a:solidFill>
                       <a:prstDash val="solid"/>
                     </a:lnR>
                     <a:lnT w="9525" cap="flat" cmpd="sng" algn="ctr">
                       <a:solidFill>
-                        <a:srgbClr val="DCEED3"/>
+                        <a:srgbClr val="D1FAEA"/>
                       </a:solidFill>
                       <a:prstDash val="solid"/>
                     </a:lnT>
                     <a:lnB w="9525" cap="flat" cmpd="sng" algn="ctr">
                       <a:solidFill>
-                        <a:srgbClr val="DCEED3"/>
+                        <a:srgbClr val="D1FAEA"/>
                       </a:solidFill>
                       <a:prstDash val="solid"/>
                     </a:lnB>
                     <a:solidFill>
-                      <a:srgbClr val="DCEED3"/>
+                      <a:srgbClr val="D1FAEA"/>
                     </a:solidFill>
                   </a:tcPr>
                 </a:tc>
@@ -4503,25 +4503,25 @@
                   <a:tcPr anchor="ctr" marL="73152" marR="73152">
                     <a:lnL w="9525" cap="flat" cmpd="sng" algn="ctr">
                       <a:solidFill>
-                        <a:srgbClr val="DCEED3"/>
+                        <a:srgbClr val="D1FAEA"/>
                       </a:solidFill>
                       <a:prstDash val="solid"/>
                     </a:lnL>
                     <a:lnR w="9525" cap="flat" cmpd="sng" algn="ctr">
                       <a:solidFill>
-                        <a:srgbClr val="DCEED3"/>
+                        <a:srgbClr val="D1FAEA"/>
                       </a:solidFill>
                       <a:prstDash val="solid"/>
                     </a:lnR>
                     <a:lnT w="9525" cap="flat" cmpd="sng" algn="ctr">
                       <a:solidFill>
-                        <a:srgbClr val="DCEED3"/>
+                        <a:srgbClr val="D1FAEA"/>
                       </a:solidFill>
                       <a:prstDash val="solid"/>
                     </a:lnT>
                     <a:lnB w="9525" cap="flat" cmpd="sng" algn="ctr">
                       <a:solidFill>
-                        <a:srgbClr val="DCEED3"/>
+                        <a:srgbClr val="D1FAEA"/>
                       </a:solidFill>
                       <a:prstDash val="solid"/>
                     </a:lnB>
@@ -4549,25 +4549,25 @@
                   <a:tcPr anchor="ctr" marL="73152" marR="73152">
                     <a:lnL w="9525" cap="flat" cmpd="sng" algn="ctr">
                       <a:solidFill>
-                        <a:srgbClr val="DCEED3"/>
+                        <a:srgbClr val="D1FAEA"/>
                       </a:solidFill>
                       <a:prstDash val="solid"/>
                     </a:lnL>
                     <a:lnR w="9525" cap="flat" cmpd="sng" algn="ctr">
                       <a:solidFill>
-                        <a:srgbClr val="DCEED3"/>
+                        <a:srgbClr val="D1FAEA"/>
                       </a:solidFill>
                       <a:prstDash val="solid"/>
                     </a:lnR>
                     <a:lnT w="9525" cap="flat" cmpd="sng" algn="ctr">
                       <a:solidFill>
-                        <a:srgbClr val="DCEED3"/>
+                        <a:srgbClr val="D1FAEA"/>
                       </a:solidFill>
                       <a:prstDash val="solid"/>
                     </a:lnT>
                     <a:lnB w="9525" cap="flat" cmpd="sng" algn="ctr">
                       <a:solidFill>
-                        <a:srgbClr val="DCEED3"/>
+                        <a:srgbClr val="D1FAEA"/>
                       </a:solidFill>
                       <a:prstDash val="solid"/>
                     </a:lnB>
@@ -4587,7 +4587,7 @@
                       <a:r>
                         <a:rPr sz="1500" b="1">
                           <a:solidFill>
-                            <a:srgbClr val="314F22"/>
+                            <a:srgbClr val="115F41"/>
                           </a:solidFill>
                         </a:rPr>
                         <a:t>00:00</a:t>
@@ -4597,30 +4597,30 @@
                   <a:tcPr anchor="ctr" marL="73152" marR="73152">
                     <a:lnL w="9525" cap="flat" cmpd="sng" algn="ctr">
                       <a:solidFill>
-                        <a:srgbClr val="DCEED3"/>
+                        <a:srgbClr val="D1FAEA"/>
                       </a:solidFill>
                       <a:prstDash val="solid"/>
                     </a:lnL>
                     <a:lnR w="9525" cap="flat" cmpd="sng" algn="ctr">
                       <a:solidFill>
-                        <a:srgbClr val="DCEED3"/>
+                        <a:srgbClr val="D1FAEA"/>
                       </a:solidFill>
                       <a:prstDash val="solid"/>
                     </a:lnR>
                     <a:lnT w="9525" cap="flat" cmpd="sng" algn="ctr">
                       <a:solidFill>
-                        <a:srgbClr val="DCEED3"/>
+                        <a:srgbClr val="D1FAEA"/>
                       </a:solidFill>
                       <a:prstDash val="solid"/>
                     </a:lnT>
                     <a:lnB w="9525" cap="flat" cmpd="sng" algn="ctr">
                       <a:solidFill>
-                        <a:srgbClr val="DCEED3"/>
+                        <a:srgbClr val="D1FAEA"/>
                       </a:solidFill>
                       <a:prstDash val="solid"/>
                     </a:lnB>
                     <a:solidFill>
-                      <a:srgbClr val="DCEED3"/>
+                      <a:srgbClr val="D1FAEA"/>
                     </a:solidFill>
                   </a:tcPr>
                 </a:tc>
@@ -4643,30 +4643,30 @@
                   <a:tcPr anchor="ctr" marL="73152" marR="73152">
                     <a:lnL w="9525" cap="flat" cmpd="sng" algn="ctr">
                       <a:solidFill>
-                        <a:srgbClr val="DCEED3"/>
+                        <a:srgbClr val="D1FAEA"/>
                       </a:solidFill>
                       <a:prstDash val="solid"/>
                     </a:lnL>
                     <a:lnR w="9525" cap="flat" cmpd="sng" algn="ctr">
                       <a:solidFill>
-                        <a:srgbClr val="DCEED3"/>
+                        <a:srgbClr val="D1FAEA"/>
                       </a:solidFill>
                       <a:prstDash val="solid"/>
                     </a:lnR>
                     <a:lnT w="9525" cap="flat" cmpd="sng" algn="ctr">
                       <a:solidFill>
-                        <a:srgbClr val="DCEED3"/>
+                        <a:srgbClr val="D1FAEA"/>
                       </a:solidFill>
                       <a:prstDash val="solid"/>
                     </a:lnT>
                     <a:lnB w="9525" cap="flat" cmpd="sng" algn="ctr">
                       <a:solidFill>
-                        <a:srgbClr val="DCEED3"/>
+                        <a:srgbClr val="D1FAEA"/>
                       </a:solidFill>
                       <a:prstDash val="solid"/>
                     </a:lnB>
                     <a:solidFill>
-                      <a:srgbClr val="F3F9F1"/>
+                      <a:srgbClr val="EEFCF6"/>
                     </a:solidFill>
                   </a:tcPr>
                 </a:tc>
@@ -4689,30 +4689,30 @@
                   <a:tcPr anchor="ctr" marL="73152" marR="73152">
                     <a:lnL w="9525" cap="flat" cmpd="sng" algn="ctr">
                       <a:solidFill>
-                        <a:srgbClr val="DCEED3"/>
+                        <a:srgbClr val="D1FAEA"/>
                       </a:solidFill>
                       <a:prstDash val="solid"/>
                     </a:lnL>
                     <a:lnR w="9525" cap="flat" cmpd="sng" algn="ctr">
                       <a:solidFill>
-                        <a:srgbClr val="DCEED3"/>
+                        <a:srgbClr val="D1FAEA"/>
                       </a:solidFill>
                       <a:prstDash val="solid"/>
                     </a:lnR>
                     <a:lnT w="9525" cap="flat" cmpd="sng" algn="ctr">
                       <a:solidFill>
-                        <a:srgbClr val="DCEED3"/>
+                        <a:srgbClr val="D1FAEA"/>
                       </a:solidFill>
                       <a:prstDash val="solid"/>
                     </a:lnT>
                     <a:lnB w="9525" cap="flat" cmpd="sng" algn="ctr">
                       <a:solidFill>
-                        <a:srgbClr val="DCEED3"/>
+                        <a:srgbClr val="D1FAEA"/>
                       </a:solidFill>
                       <a:prstDash val="solid"/>
                     </a:lnB>
                     <a:solidFill>
-                      <a:srgbClr val="F3F9F1"/>
+                      <a:srgbClr val="EEFCF6"/>
                     </a:solidFill>
                   </a:tcPr>
                 </a:tc>
@@ -4727,7 +4727,7 @@
                       <a:r>
                         <a:rPr sz="1500" b="1">
                           <a:solidFill>
-                            <a:srgbClr val="314F22"/>
+                            <a:srgbClr val="115F41"/>
                           </a:solidFill>
                         </a:rPr>
                         <a:t>00:00</a:t>
@@ -4737,30 +4737,30 @@
                   <a:tcPr anchor="ctr" marL="73152" marR="73152">
                     <a:lnL w="9525" cap="flat" cmpd="sng" algn="ctr">
                       <a:solidFill>
-                        <a:srgbClr val="DCEED3"/>
+                        <a:srgbClr val="D1FAEA"/>
                       </a:solidFill>
                       <a:prstDash val="solid"/>
                     </a:lnL>
                     <a:lnR w="9525" cap="flat" cmpd="sng" algn="ctr">
                       <a:solidFill>
-                        <a:srgbClr val="DCEED3"/>
+                        <a:srgbClr val="D1FAEA"/>
                       </a:solidFill>
                       <a:prstDash val="solid"/>
                     </a:lnR>
                     <a:lnT w="9525" cap="flat" cmpd="sng" algn="ctr">
                       <a:solidFill>
-                        <a:srgbClr val="DCEED3"/>
+                        <a:srgbClr val="D1FAEA"/>
                       </a:solidFill>
                       <a:prstDash val="solid"/>
                     </a:lnT>
                     <a:lnB w="9525" cap="flat" cmpd="sng" algn="ctr">
                       <a:solidFill>
-                        <a:srgbClr val="DCEED3"/>
+                        <a:srgbClr val="D1FAEA"/>
                       </a:solidFill>
                       <a:prstDash val="solid"/>
                     </a:lnB>
                     <a:solidFill>
-                      <a:srgbClr val="DCEED3"/>
+                      <a:srgbClr val="D1FAEA"/>
                     </a:solidFill>
                   </a:tcPr>
                 </a:tc>
@@ -4783,25 +4783,25 @@
                   <a:tcPr anchor="ctr" marL="73152" marR="73152">
                     <a:lnL w="9525" cap="flat" cmpd="sng" algn="ctr">
                       <a:solidFill>
-                        <a:srgbClr val="DCEED3"/>
+                        <a:srgbClr val="D1FAEA"/>
                       </a:solidFill>
                       <a:prstDash val="solid"/>
                     </a:lnL>
                     <a:lnR w="9525" cap="flat" cmpd="sng" algn="ctr">
                       <a:solidFill>
-                        <a:srgbClr val="DCEED3"/>
+                        <a:srgbClr val="D1FAEA"/>
                       </a:solidFill>
                       <a:prstDash val="solid"/>
                     </a:lnR>
                     <a:lnT w="9525" cap="flat" cmpd="sng" algn="ctr">
                       <a:solidFill>
-                        <a:srgbClr val="DCEED3"/>
+                        <a:srgbClr val="D1FAEA"/>
                       </a:solidFill>
                       <a:prstDash val="solid"/>
                     </a:lnT>
                     <a:lnB w="9525" cap="flat" cmpd="sng" algn="ctr">
                       <a:solidFill>
-                        <a:srgbClr val="DCEED3"/>
+                        <a:srgbClr val="D1FAEA"/>
                       </a:solidFill>
                       <a:prstDash val="solid"/>
                     </a:lnB>
@@ -4829,25 +4829,25 @@
                   <a:tcPr anchor="ctr" marL="73152" marR="73152">
                     <a:lnL w="9525" cap="flat" cmpd="sng" algn="ctr">
                       <a:solidFill>
-                        <a:srgbClr val="DCEED3"/>
+                        <a:srgbClr val="D1FAEA"/>
                       </a:solidFill>
                       <a:prstDash val="solid"/>
                     </a:lnL>
                     <a:lnR w="9525" cap="flat" cmpd="sng" algn="ctr">
                       <a:solidFill>
-                        <a:srgbClr val="DCEED3"/>
+                        <a:srgbClr val="D1FAEA"/>
                       </a:solidFill>
                       <a:prstDash val="solid"/>
                     </a:lnR>
                     <a:lnT w="9525" cap="flat" cmpd="sng" algn="ctr">
                       <a:solidFill>
-                        <a:srgbClr val="DCEED3"/>
+                        <a:srgbClr val="D1FAEA"/>
                       </a:solidFill>
                       <a:prstDash val="solid"/>
                     </a:lnT>
                     <a:lnB w="9525" cap="flat" cmpd="sng" algn="ctr">
                       <a:solidFill>
-                        <a:srgbClr val="DCEED3"/>
+                        <a:srgbClr val="D1FAEA"/>
                       </a:solidFill>
                       <a:prstDash val="solid"/>
                     </a:lnB>
@@ -4875,7 +4875,7 @@
     <p:bg>
       <p:bgPr>
         <a:solidFill>
-          <a:srgbClr val="F3F9F1"/>
+          <a:srgbClr val="EEFCF6"/>
         </a:solidFill>
         <a:effectLst/>
       </p:bgPr>
@@ -4902,7 +4902,7 @@
             <a:avLst/>
           </a:prstGeom>
           <a:solidFill>
-            <a:srgbClr val="5D9640"/>
+            <a:srgbClr val="26C588"/>
           </a:solidFill>
           <a:ln>
             <a:noFill/>
@@ -4931,7 +4931,7 @@
             <a:avLst/>
           </a:prstGeom>
           <a:solidFill>
-            <a:srgbClr val="4B3D8F"/>
+            <a:srgbClr val="209DB6"/>
           </a:solidFill>
           <a:ln>
             <a:noFill/>
@@ -4975,7 +4975,7 @@
             <a:r>
               <a:rPr sz="3000" b="1" i="0">
                 <a:solidFill>
-                  <a:srgbClr val="314F22"/>
+                  <a:srgbClr val="115F41"/>
                 </a:solidFill>
               </a:rPr>
               <a:t>하객 안내</a:t>
@@ -5000,11 +5000,11 @@
             </a:avLst>
           </a:prstGeom>
           <a:solidFill>
-            <a:srgbClr val="F3F9F1"/>
+            <a:srgbClr val="EEFCF6"/>
           </a:solidFill>
           <a:ln w="15875">
             <a:solidFill>
-              <a:srgbClr val="DCEED3"/>
+              <a:srgbClr val="D1FAEA"/>
             </a:solidFill>
           </a:ln>
         </p:spPr>
@@ -5031,7 +5031,7 @@
             <a:avLst/>
           </a:prstGeom>
           <a:solidFill>
-            <a:srgbClr val="5D9640"/>
+            <a:srgbClr val="26C588"/>
           </a:solidFill>
           <a:ln>
             <a:noFill/>
@@ -5089,7 +5089,7 @@
             <a:r>
               <a:rPr sz="1800" b="1" i="0">
                 <a:solidFill>
-                  <a:srgbClr val="314F22"/>
+                  <a:srgbClr val="115F41"/>
                 </a:solidFill>
               </a:rPr>
               <a:t>주차 안내</a:t>
@@ -5152,11 +5152,11 @@
             </a:avLst>
           </a:prstGeom>
           <a:solidFill>
-            <a:srgbClr val="F3F9F1"/>
+            <a:srgbClr val="EEFCF6"/>
           </a:solidFill>
           <a:ln w="15875">
             <a:solidFill>
-              <a:srgbClr val="DCEED3"/>
+              <a:srgbClr val="D1FAEA"/>
             </a:solidFill>
           </a:ln>
         </p:spPr>
@@ -5183,7 +5183,7 @@
             <a:avLst/>
           </a:prstGeom>
           <a:solidFill>
-            <a:srgbClr val="5D9640"/>
+            <a:srgbClr val="26C588"/>
           </a:solidFill>
           <a:ln>
             <a:noFill/>
@@ -5241,7 +5241,7 @@
             <a:r>
               <a:rPr sz="1800" b="1" i="0">
                 <a:solidFill>
-                  <a:srgbClr val="314F22"/>
+                  <a:srgbClr val="115F41"/>
                 </a:solidFill>
               </a:rPr>
               <a:t>식사 안내</a:t>
@@ -5304,11 +5304,11 @@
             </a:avLst>
           </a:prstGeom>
           <a:solidFill>
-            <a:srgbClr val="F3F9F1"/>
+            <a:srgbClr val="EEFCF6"/>
           </a:solidFill>
           <a:ln w="15875">
             <a:solidFill>
-              <a:srgbClr val="DCEED3"/>
+              <a:srgbClr val="D1FAEA"/>
             </a:solidFill>
           </a:ln>
         </p:spPr>
@@ -5335,7 +5335,7 @@
             <a:avLst/>
           </a:prstGeom>
           <a:solidFill>
-            <a:srgbClr val="5D9640"/>
+            <a:srgbClr val="26C588"/>
           </a:solidFill>
           <a:ln>
             <a:noFill/>
@@ -5393,7 +5393,7 @@
             <a:r>
               <a:rPr sz="1800" b="1" i="0">
                 <a:solidFill>
-                  <a:srgbClr val="314F22"/>
+                  <a:srgbClr val="115F41"/>
                 </a:solidFill>
               </a:rPr>
               <a:t>기념 촬영</a:t>
@@ -5453,7 +5453,7 @@
     <p:bg>
       <p:bgPr>
         <a:solidFill>
-          <a:srgbClr val="F3F9F1"/>
+          <a:srgbClr val="EEFCF6"/>
         </a:solidFill>
         <a:effectLst/>
       </p:bgPr>
@@ -5480,7 +5480,7 @@
             <a:avLst/>
           </a:prstGeom>
           <a:solidFill>
-            <a:srgbClr val="5D9640"/>
+            <a:srgbClr val="26C588"/>
           </a:solidFill>
           <a:ln>
             <a:noFill/>
@@ -5509,7 +5509,7 @@
             <a:avLst/>
           </a:prstGeom>
           <a:solidFill>
-            <a:srgbClr val="4B3D8F"/>
+            <a:srgbClr val="209DB6"/>
           </a:solidFill>
           <a:ln>
             <a:noFill/>
@@ -5553,7 +5553,7 @@
             <a:r>
               <a:rPr sz="3000" b="1" i="0">
                 <a:solidFill>
-                  <a:srgbClr val="314F22"/>
+                  <a:srgbClr val="115F41"/>
                 </a:solidFill>
               </a:rPr>
               <a:t>웨딩 사진</a:t>
@@ -5578,11 +5578,11 @@
             </a:avLst>
           </a:prstGeom>
           <a:solidFill>
-            <a:srgbClr val="DCEED3"/>
+            <a:srgbClr val="D1FAEA"/>
           </a:solidFill>
           <a:ln w="19050">
             <a:solidFill>
-              <a:srgbClr val="5D9640"/>
+              <a:srgbClr val="26C588"/>
             </a:solidFill>
             <a:prstDash val="dash"/>
           </a:ln>
@@ -5601,7 +5601,7 @@
             <a:r>
               <a:rPr sz="1200" b="0" i="0">
                 <a:solidFill>
-                  <a:srgbClr val="314F22"/>
+                  <a:srgbClr val="115F41"/>
                 </a:solidFill>
               </a:rPr>
               <a:t>사진 1</a:t>
@@ -5626,11 +5626,11 @@
             </a:avLst>
           </a:prstGeom>
           <a:solidFill>
-            <a:srgbClr val="DCEED3"/>
+            <a:srgbClr val="D1FAEA"/>
           </a:solidFill>
           <a:ln w="19050">
             <a:solidFill>
-              <a:srgbClr val="5D9640"/>
+              <a:srgbClr val="26C588"/>
             </a:solidFill>
             <a:prstDash val="dash"/>
           </a:ln>
@@ -5649,7 +5649,7 @@
             <a:r>
               <a:rPr sz="1200" b="0" i="0">
                 <a:solidFill>
-                  <a:srgbClr val="314F22"/>
+                  <a:srgbClr val="115F41"/>
                 </a:solidFill>
               </a:rPr>
               <a:t>사진 2</a:t>
@@ -5674,11 +5674,11 @@
             </a:avLst>
           </a:prstGeom>
           <a:solidFill>
-            <a:srgbClr val="DCEED3"/>
+            <a:srgbClr val="D1FAEA"/>
           </a:solidFill>
           <a:ln w="19050">
             <a:solidFill>
-              <a:srgbClr val="5D9640"/>
+              <a:srgbClr val="26C588"/>
             </a:solidFill>
             <a:prstDash val="dash"/>
           </a:ln>
@@ -5697,7 +5697,7 @@
             <a:r>
               <a:rPr sz="1200" b="0" i="0">
                 <a:solidFill>
-                  <a:srgbClr val="314F22"/>
+                  <a:srgbClr val="115F41"/>
                 </a:solidFill>
               </a:rPr>
               <a:t>사진 3</a:t>
@@ -5722,11 +5722,11 @@
             </a:avLst>
           </a:prstGeom>
           <a:solidFill>
-            <a:srgbClr val="DCEED3"/>
+            <a:srgbClr val="D1FAEA"/>
           </a:solidFill>
           <a:ln w="19050">
             <a:solidFill>
-              <a:srgbClr val="5D9640"/>
+              <a:srgbClr val="26C588"/>
             </a:solidFill>
             <a:prstDash val="dash"/>
           </a:ln>
@@ -5745,7 +5745,7 @@
             <a:r>
               <a:rPr sz="1200" b="0" i="0">
                 <a:solidFill>
-                  <a:srgbClr val="314F22"/>
+                  <a:srgbClr val="115F41"/>
                 </a:solidFill>
               </a:rPr>
               <a:t>사진 4</a:t>
@@ -5770,11 +5770,11 @@
             </a:avLst>
           </a:prstGeom>
           <a:solidFill>
-            <a:srgbClr val="DCEED3"/>
+            <a:srgbClr val="D1FAEA"/>
           </a:solidFill>
           <a:ln w="19050">
             <a:solidFill>
-              <a:srgbClr val="5D9640"/>
+              <a:srgbClr val="26C588"/>
             </a:solidFill>
             <a:prstDash val="dash"/>
           </a:ln>
@@ -5793,7 +5793,7 @@
             <a:r>
               <a:rPr sz="1200" b="0" i="0">
                 <a:solidFill>
-                  <a:srgbClr val="314F22"/>
+                  <a:srgbClr val="115F41"/>
                 </a:solidFill>
               </a:rPr>
               <a:t>사진 5</a:t>
@@ -5818,11 +5818,11 @@
             </a:avLst>
           </a:prstGeom>
           <a:solidFill>
-            <a:srgbClr val="DCEED3"/>
+            <a:srgbClr val="D1FAEA"/>
           </a:solidFill>
           <a:ln w="19050">
             <a:solidFill>
-              <a:srgbClr val="5D9640"/>
+              <a:srgbClr val="26C588"/>
             </a:solidFill>
             <a:prstDash val="dash"/>
           </a:ln>
@@ -5841,7 +5841,7 @@
             <a:r>
               <a:rPr sz="1200" b="0" i="0">
                 <a:solidFill>
-                  <a:srgbClr val="314F22"/>
+                  <a:srgbClr val="115F41"/>
                 </a:solidFill>
               </a:rPr>
               <a:t>사진 6</a:t>
@@ -5921,7 +5921,7 @@
             <a:r>
               <a:rPr sz="3400" b="1" i="0">
                 <a:solidFill>
-                  <a:srgbClr val="314F22"/>
+                  <a:srgbClr val="115F41"/>
                 </a:solidFill>
               </a:rPr>
               <a:t>와 주셔서 고맙습니다</a:t>
@@ -5959,7 +5959,7 @@
             <a:r>
               <a:rPr sz="1700" b="0" i="1">
                 <a:solidFill>
-                  <a:srgbClr val="314F22"/>
+                  <a:srgbClr val="115F41"/>
                 </a:solidFill>
               </a:rPr>
               <a:t>잘 살겠습니다</a:t>
@@ -6024,34 +6024,34 @@
         <a:sysClr val="window" lastClr="FFFFFF"/>
       </a:lt1>
       <a:dk2>
-        <a:srgbClr val="314F22"/>
+        <a:srgbClr val="115F41"/>
       </a:dk2>
       <a:lt2>
-        <a:srgbClr val="F3F9F1"/>
+        <a:srgbClr val="EEFCF6"/>
       </a:lt2>
       <a:accent1>
-        <a:srgbClr val="5D9640"/>
+        <a:srgbClr val="26C588"/>
       </a:accent1>
       <a:accent2>
-        <a:srgbClr val="4B3D8F"/>
+        <a:srgbClr val="209DB6"/>
       </a:accent2>
       <a:accent3>
-        <a:srgbClr val="314F22"/>
+        <a:srgbClr val="115F41"/>
       </a:accent3>
       <a:accent4>
-        <a:srgbClr val="DCEED3"/>
+        <a:srgbClr val="D1FAEA"/>
       </a:accent4>
       <a:accent5>
-        <a:srgbClr val="546A68"/>
+        <a:srgbClr val="23B19F"/>
       </a:accent5>
       <a:accent6>
-        <a:srgbClr val="83957A"/>
+        <a:srgbClr val="709F8D"/>
       </a:accent6>
       <a:hlink>
-        <a:srgbClr val="5D9640"/>
+        <a:srgbClr val="26C588"/>
       </a:hlink>
       <a:folHlink>
-        <a:srgbClr val="314F22"/>
+        <a:srgbClr val="115F41"/>
       </a:folHlink>
     </a:clrScheme>
     <a:fontScheme name="Office">
